--- a/Week_2/Pemrograman_Dasar_ESP32.pptx
+++ b/Week_2/Pemrograman_Dasar_ESP32.pptx
@@ -11304,16 +11304,25 @@
               </a:lnSpc>
             </a:pPr>
             <a:r>
-              <a:rPr sz="1800" b="0" i="0" u="none" dirty="0">
+              <a:rPr lang="en-ID" sz="1800" b="0" i="0" u="none" dirty="0" err="1">
                 <a:solidFill>
                   <a:srgbClr val="38BDF8"/>
                 </a:solidFill>
                 <a:latin typeface="Fira Code"/>
               </a:rPr>
-              <a:t>const int</a:t>
-            </a:r>
-            <a:r>
-              <a:rPr sz="1800" b="0" i="0" u="none" dirty="0">
+              <a:t>const</a:t>
+            </a:r>
+            <a:r>
+              <a:rPr lang="en-ID" sz="1800" b="0" i="0" u="none" dirty="0">
+                <a:solidFill>
+                  <a:srgbClr val="38BDF8"/>
+                </a:solidFill>
+                <a:latin typeface="Fira Code"/>
+              </a:rPr>
+              <a:t> int</a:t>
+            </a:r>
+            <a:r>
+              <a:rPr lang="en-ID" sz="1800" b="0" i="0" u="none" dirty="0">
                 <a:solidFill>
                   <a:srgbClr val="E2E8F0"/>
                 </a:solidFill>
@@ -11322,7 +11331,7 @@
               <a:t> </a:t>
             </a:r>
             <a:r>
-              <a:rPr sz="1800" b="0" i="0" u="none" dirty="0" err="1">
+              <a:rPr lang="en-ID" sz="1800" b="0" i="0" u="none" dirty="0" err="1">
                 <a:solidFill>
                   <a:srgbClr val="E2E8F0"/>
                 </a:solidFill>
@@ -11331,7 +11340,7 @@
               <a:t>ledPin</a:t>
             </a:r>
             <a:r>
-              <a:rPr sz="1800" b="0" i="0" u="none" dirty="0">
+              <a:rPr lang="en-ID" sz="1800" b="0" i="0" u="none" dirty="0">
                 <a:solidFill>
                   <a:srgbClr val="E2E8F0"/>
                 </a:solidFill>
@@ -11340,7 +11349,7 @@
               <a:t> = </a:t>
             </a:r>
             <a:r>
-              <a:rPr sz="1800" b="0" i="0" u="none" dirty="0">
+              <a:rPr lang="en-ID" sz="1800" b="0" i="0" u="none" dirty="0">
                 <a:solidFill>
                   <a:srgbClr val="F9A8D4"/>
                 </a:solidFill>
@@ -11349,7 +11358,7 @@
               <a:t>2</a:t>
             </a:r>
             <a:r>
-              <a:rPr sz="1800" b="0" i="0" u="none" dirty="0">
+              <a:rPr lang="en-ID" sz="1800" b="0" i="0" u="none" dirty="0">
                 <a:solidFill>
                   <a:srgbClr val="E2E8F0"/>
                 </a:solidFill>
@@ -11357,12 +11366,6 @@
               </a:rPr>
               <a:t>; </a:t>
             </a:r>
-            <a:endParaRPr lang="en-US" sz="1800" b="0" i="0" u="none" dirty="0">
-              <a:solidFill>
-                <a:srgbClr val="E2E8F0"/>
-              </a:solidFill>
-              <a:latin typeface="Fira Code"/>
-            </a:endParaRPr>
           </a:p>
           <a:p>
             <a:pPr algn="l">
@@ -11371,7 +11374,7 @@
               </a:lnSpc>
             </a:pPr>
             <a:r>
-              <a:rPr sz="1800" b="0" i="0" u="none" dirty="0">
+              <a:rPr lang="en-ID" sz="1800" b="0" i="0" u="none" dirty="0">
                 <a:solidFill>
                   <a:srgbClr val="38BDF8"/>
                 </a:solidFill>
@@ -11380,7 +11383,7 @@
               <a:t>void</a:t>
             </a:r>
             <a:r>
-              <a:rPr sz="1800" b="0" i="0" u="none" dirty="0">
+              <a:rPr lang="en-ID" sz="1800" b="0" i="0" u="none" dirty="0">
                 <a:solidFill>
                   <a:srgbClr val="E2E8F0"/>
                 </a:solidFill>
@@ -11389,7 +11392,7 @@
               <a:t> </a:t>
             </a:r>
             <a:r>
-              <a:rPr sz="1800" b="0" i="0" u="none" dirty="0">
+              <a:rPr lang="en-ID" sz="1800" b="0" i="0" u="none" dirty="0">
                 <a:solidFill>
                   <a:srgbClr val="FCD34D"/>
                 </a:solidFill>
@@ -11398,7 +11401,7 @@
               <a:t>setup</a:t>
             </a:r>
             <a:r>
-              <a:rPr sz="1800" b="0" i="0" u="none" dirty="0">
+              <a:rPr lang="en-ID" sz="1800" b="0" i="0" u="none" dirty="0">
                 <a:solidFill>
                   <a:srgbClr val="E2E8F0"/>
                 </a:solidFill>
@@ -11406,12 +11409,6 @@
               </a:rPr>
               <a:t>() { </a:t>
             </a:r>
-            <a:endParaRPr lang="en-US" sz="1800" b="0" i="0" u="none" dirty="0">
-              <a:solidFill>
-                <a:srgbClr val="E2E8F0"/>
-              </a:solidFill>
-              <a:latin typeface="Fira Code"/>
-            </a:endParaRPr>
           </a:p>
           <a:p>
             <a:pPr algn="l">
@@ -11429,7 +11426,7 @@
               <a:t>	</a:t>
             </a:r>
             <a:r>
-              <a:rPr sz="1800" b="0" i="0" u="none" dirty="0" err="1">
+              <a:rPr lang="en-ID" sz="1800" b="0" i="0" u="none" dirty="0" err="1">
                 <a:solidFill>
                   <a:srgbClr val="FCD34D"/>
                 </a:solidFill>
@@ -11438,7 +11435,7 @@
               <a:t>pinMode</a:t>
             </a:r>
             <a:r>
-              <a:rPr sz="1800" b="0" i="0" u="none" dirty="0">
+              <a:rPr lang="en-ID" sz="1800" b="0" i="0" u="none" dirty="0">
                 <a:solidFill>
                   <a:srgbClr val="E2E8F0"/>
                 </a:solidFill>
@@ -11447,7 +11444,7 @@
               <a:t>(</a:t>
             </a:r>
             <a:r>
-              <a:rPr sz="1800" b="0" i="0" u="none" dirty="0" err="1">
+              <a:rPr lang="en-ID" sz="1800" b="0" i="0" u="none" dirty="0" err="1">
                 <a:solidFill>
                   <a:srgbClr val="E2E8F0"/>
                 </a:solidFill>
@@ -11456,51 +11453,30 @@
               <a:t>ledPin</a:t>
             </a:r>
             <a:r>
-              <a:rPr sz="1800" b="0" i="0" u="none" dirty="0">
+              <a:rPr lang="en-ID" sz="1800" b="0" i="0" u="none" dirty="0">
                 <a:solidFill>
                   <a:srgbClr val="E2E8F0"/>
                 </a:solidFill>
                 <a:latin typeface="Fira Code"/>
               </a:rPr>
-              <a:t>, OUTPUT</a:t>
-            </a:r>
-            <a:r>
-              <a:rPr sz="1800" b="0" i="0" u="none">
+              <a:t>, OUTPUT); </a:t>
+            </a:r>
+          </a:p>
+          <a:p>
+            <a:pPr algn="l">
+              <a:lnSpc>
+                <a:spcPts val="2700"/>
+              </a:lnSpc>
+            </a:pPr>
+            <a:r>
+              <a:rPr lang="en-ID" sz="1800" b="0" i="0" u="none" dirty="0">
                 <a:solidFill>
                   <a:srgbClr val="E2E8F0"/>
                 </a:solidFill>
                 <a:latin typeface="Fira Code"/>
               </a:rPr>
-              <a:t>); </a:t>
-            </a:r>
-            <a:endParaRPr lang="en-US" sz="1800" b="0" i="0" u="none">
-              <a:solidFill>
-                <a:srgbClr val="E2E8F0"/>
-              </a:solidFill>
-              <a:latin typeface="Fira Code"/>
-            </a:endParaRPr>
-          </a:p>
-          <a:p>
-            <a:pPr algn="l">
-              <a:lnSpc>
-                <a:spcPts val="2700"/>
-              </a:lnSpc>
-            </a:pPr>
-            <a:r>
-              <a:rPr sz="1800" b="0" i="0" u="none">
-                <a:solidFill>
-                  <a:srgbClr val="E2E8F0"/>
-                </a:solidFill>
-                <a:latin typeface="Fira Code"/>
-              </a:rPr>
               <a:t>}</a:t>
             </a:r>
-            <a:endParaRPr sz="1800" b="0" i="0" u="none" dirty="0">
-              <a:solidFill>
-                <a:srgbClr val="E2E8F0"/>
-              </a:solidFill>
-              <a:latin typeface="Fira Code"/>
-            </a:endParaRPr>
           </a:p>
         </p:txBody>
       </p:sp>
@@ -11751,7 +11727,7 @@
         <p:spPr>
           <a:xfrm>
             <a:off x="1066800" y="2344935"/>
-            <a:ext cx="10153650" cy="2762250"/>
+            <a:ext cx="10153650" cy="2058897"/>
           </a:xfrm>
           <a:prstGeom prst="rect">
             <a:avLst/>
@@ -11770,7 +11746,7 @@
               </a:lnSpc>
             </a:pPr>
             <a:r>
-              <a:rPr sz="1800" b="0" i="0" u="none">
+              <a:rPr sz="1800" b="0" i="0" u="none" dirty="0">
                 <a:solidFill>
                   <a:srgbClr val="38BDF8"/>
                 </a:solidFill>
@@ -11779,7 +11755,7 @@
               <a:t>void</a:t>
             </a:r>
             <a:r>
-              <a:rPr sz="1800" b="0" i="0" u="none">
+              <a:rPr sz="1800" b="0" i="0" u="none" dirty="0">
                 <a:solidFill>
                   <a:srgbClr val="E2E8F0"/>
                 </a:solidFill>
@@ -11788,7 +11764,7 @@
               <a:t> </a:t>
             </a:r>
             <a:r>
-              <a:rPr sz="1800" b="0" i="0" u="none">
+              <a:rPr sz="1800" b="0" i="0" u="none" dirty="0">
                 <a:solidFill>
                   <a:srgbClr val="FCD34D"/>
                 </a:solidFill>
@@ -11797,7 +11773,7 @@
               <a:t>loop</a:t>
             </a:r>
             <a:r>
-              <a:rPr sz="1800" b="0" i="0" u="none">
+              <a:rPr sz="1800" b="0" i="0" u="none" dirty="0">
                 <a:solidFill>
                   <a:srgbClr val="E2E8F0"/>
                 </a:solidFill>
@@ -11805,8 +11781,30 @@
               </a:rPr>
               <a:t>() { </a:t>
             </a:r>
-            <a:r>
-              <a:rPr sz="1800" b="0" i="0" u="none">
+            <a:endParaRPr lang="en-US" sz="1800" b="0" i="0" u="none" dirty="0">
+              <a:solidFill>
+                <a:srgbClr val="E2E8F0"/>
+              </a:solidFill>
+              <a:latin typeface="Fira Code"/>
+            </a:endParaRPr>
+          </a:p>
+          <a:p>
+            <a:pPr algn="l">
+              <a:lnSpc>
+                <a:spcPts val="2700"/>
+              </a:lnSpc>
+            </a:pPr>
+            <a:r>
+              <a:rPr lang="en-ID" dirty="0">
+                <a:solidFill>
+                  <a:srgbClr val="E2E8F0"/>
+                </a:solidFill>
+                <a:latin typeface="Fira Code"/>
+              </a:rPr>
+              <a:t>	</a:t>
+            </a:r>
+            <a:r>
+              <a:rPr sz="1800" b="0" i="0" u="none" dirty="0" err="1">
                 <a:solidFill>
                   <a:srgbClr val="FCD34D"/>
                 </a:solidFill>
@@ -11815,34 +11813,56 @@
               <a:t>digitalWrite</a:t>
             </a:r>
             <a:r>
-              <a:rPr sz="1800" b="0" i="0" u="none">
+              <a:rPr sz="1800" b="0" i="0" u="none" dirty="0">
                 <a:solidFill>
                   <a:srgbClr val="E2E8F0"/>
                 </a:solidFill>
                 <a:latin typeface="Fira Code"/>
               </a:rPr>
-              <a:t>(ledPin, HIGH); </a:t>
-            </a:r>
-            <a:r>
-              <a:rPr sz="1800" b="0" i="0" u="none">
-                <a:solidFill>
-                  <a:srgbClr val="64748B"/>
+              <a:t>(</a:t>
+            </a:r>
+            <a:r>
+              <a:rPr sz="1800" b="0" i="0" u="none" dirty="0" err="1">
+                <a:solidFill>
+                  <a:srgbClr val="E2E8F0"/>
                 </a:solidFill>
                 <a:latin typeface="Fira Code"/>
               </a:rPr>
-              <a:t>// Nyalakan (3.3V)</a:t>
-            </a:r>
-            <a:r>
-              <a:rPr sz="1800" b="0" i="0" u="none">
+              <a:t>ledPin</a:t>
+            </a:r>
+            <a:r>
+              <a:rPr sz="1800" b="0" i="0" u="none" dirty="0">
                 <a:solidFill>
                   <a:srgbClr val="E2E8F0"/>
                 </a:solidFill>
                 <a:latin typeface="Fira Code"/>
               </a:rPr>
-              <a:t> </a:t>
-            </a:r>
-            <a:r>
-              <a:rPr sz="1800" b="0" i="0" u="none">
+              <a:t>, HIGH); </a:t>
+            </a:r>
+            <a:endParaRPr lang="en-US" sz="1800" b="0" i="0" u="none" dirty="0">
+              <a:solidFill>
+                <a:srgbClr val="E2E8F0"/>
+              </a:solidFill>
+              <a:latin typeface="Fira Code"/>
+            </a:endParaRPr>
+          </a:p>
+          <a:p>
+            <a:pPr algn="l">
+              <a:lnSpc>
+                <a:spcPts val="2700"/>
+              </a:lnSpc>
+            </a:pPr>
+            <a:r>
+              <a:rPr lang="en-ID" dirty="0">
+                <a:solidFill>
+                  <a:srgbClr val="E2E8F0"/>
+                </a:solidFill>
+                <a:latin typeface="Fira Code"/>
+              </a:rPr>
+              <a:t>	</a:t>
+            </a:r>
+            <a:r>
+              <a:rPr sz="1800" b="0" i="0" u="none" dirty="0">
                 <a:solidFill>
                   <a:srgbClr val="FCD34D"/>
                 </a:solidFill>
@@ -11851,7 +11871,7 @@
               <a:t>delay</a:t>
             </a:r>
             <a:r>
-              <a:rPr sz="1800" b="0" i="0" u="none">
+              <a:rPr sz="1800" b="0" i="0" u="none" dirty="0">
                 <a:solidFill>
                   <a:srgbClr val="E2E8F0"/>
                 </a:solidFill>
@@ -11860,7 +11880,7 @@
               <a:t>(</a:t>
             </a:r>
             <a:r>
-              <a:rPr sz="1800" b="0" i="0" u="none">
+              <a:rPr sz="1800" b="0" i="0" u="none" dirty="0">
                 <a:solidFill>
                   <a:srgbClr val="F9A8D4"/>
                 </a:solidFill>
@@ -11869,7 +11889,7 @@
               <a:t>1000</a:t>
             </a:r>
             <a:r>
-              <a:rPr sz="1800" b="0" i="0" u="none">
+              <a:rPr sz="1800" b="0" i="0" u="none" dirty="0">
                 <a:solidFill>
                   <a:srgbClr val="E2E8F0"/>
                 </a:solidFill>
@@ -11877,113 +11897,143 @@
               </a:rPr>
               <a:t>); </a:t>
             </a:r>
-            <a:r>
-              <a:rPr sz="1800" b="0" i="0" u="none">
-                <a:solidFill>
-                  <a:srgbClr val="64748B"/>
+            <a:endParaRPr lang="en-US" sz="1800" b="0" i="0" u="none" dirty="0">
+              <a:solidFill>
+                <a:srgbClr val="E2E8F0"/>
+              </a:solidFill>
+              <a:latin typeface="Fira Code"/>
+            </a:endParaRPr>
+          </a:p>
+          <a:p>
+            <a:pPr algn="l">
+              <a:lnSpc>
+                <a:spcPts val="2700"/>
+              </a:lnSpc>
+            </a:pPr>
+            <a:r>
+              <a:rPr lang="en-ID" dirty="0">
+                <a:solidFill>
+                  <a:srgbClr val="E2E8F0"/>
                 </a:solidFill>
                 <a:latin typeface="Fira Code"/>
               </a:rPr>
-              <a:t>// Tunggu 1 detik</a:t>
-            </a:r>
-            <a:r>
-              <a:rPr sz="1800" b="0" i="0" u="none">
+              <a:t>	</a:t>
+            </a:r>
+            <a:r>
+              <a:rPr sz="1800" b="0" i="0" u="none" dirty="0" err="1">
+                <a:solidFill>
+                  <a:srgbClr val="FCD34D"/>
+                </a:solidFill>
+                <a:latin typeface="Fira Code"/>
+              </a:rPr>
+              <a:t>digitalWrite</a:t>
+            </a:r>
+            <a:r>
+              <a:rPr sz="1800" b="0" i="0" u="none" dirty="0">
                 <a:solidFill>
                   <a:srgbClr val="E2E8F0"/>
                 </a:solidFill>
                 <a:latin typeface="Fira Code"/>
               </a:rPr>
-              <a:t> </a:t>
-            </a:r>
-            <a:r>
-              <a:rPr sz="1800" b="0" i="0" u="none">
+              <a:t>(</a:t>
+            </a:r>
+            <a:r>
+              <a:rPr sz="1800" b="0" i="0" u="none" dirty="0" err="1">
+                <a:solidFill>
+                  <a:srgbClr val="E2E8F0"/>
+                </a:solidFill>
+                <a:latin typeface="Fira Code"/>
+              </a:rPr>
+              <a:t>ledPin</a:t>
+            </a:r>
+            <a:r>
+              <a:rPr sz="1800" b="0" i="0" u="none" dirty="0">
+                <a:solidFill>
+                  <a:srgbClr val="E2E8F0"/>
+                </a:solidFill>
+                <a:latin typeface="Fira Code"/>
+              </a:rPr>
+              <a:t>, LOW); </a:t>
+            </a:r>
+            <a:endParaRPr lang="en-US" sz="1800" b="0" i="0" u="none" dirty="0">
+              <a:solidFill>
+                <a:srgbClr val="E2E8F0"/>
+              </a:solidFill>
+              <a:latin typeface="Fira Code"/>
+            </a:endParaRPr>
+          </a:p>
+          <a:p>
+            <a:pPr algn="l">
+              <a:lnSpc>
+                <a:spcPts val="2700"/>
+              </a:lnSpc>
+            </a:pPr>
+            <a:r>
+              <a:rPr lang="en-ID" dirty="0">
+                <a:solidFill>
+                  <a:srgbClr val="E2E8F0"/>
+                </a:solidFill>
+                <a:latin typeface="Fira Code"/>
+              </a:rPr>
+              <a:t>	</a:t>
+            </a:r>
+            <a:r>
+              <a:rPr sz="1800" b="0" i="0" u="none" dirty="0">
                 <a:solidFill>
                   <a:srgbClr val="FCD34D"/>
                 </a:solidFill>
                 <a:latin typeface="Fira Code"/>
               </a:rPr>
-              <a:t>digitalWrite</a:t>
-            </a:r>
-            <a:r>
-              <a:rPr sz="1800" b="0" i="0" u="none">
+              <a:t>delay</a:t>
+            </a:r>
+            <a:r>
+              <a:rPr sz="1800" b="0" i="0" u="none" dirty="0">
                 <a:solidFill>
                   <a:srgbClr val="E2E8F0"/>
                 </a:solidFill>
                 <a:latin typeface="Fira Code"/>
               </a:rPr>
-              <a:t>(ledPin, LOW); </a:t>
-            </a:r>
-            <a:r>
-              <a:rPr sz="1800" b="0" i="0" u="none">
-                <a:solidFill>
-                  <a:srgbClr val="64748B"/>
+              <a:t>(</a:t>
+            </a:r>
+            <a:r>
+              <a:rPr sz="1800" b="0" i="0" u="none" dirty="0">
+                <a:solidFill>
+                  <a:srgbClr val="F9A8D4"/>
                 </a:solidFill>
                 <a:latin typeface="Fira Code"/>
               </a:rPr>
-              <a:t>// Matikan (0V)</a:t>
-            </a:r>
-            <a:r>
-              <a:rPr sz="1800" b="0" i="0" u="none">
+              <a:t>1000</a:t>
+            </a:r>
+            <a:r>
+              <a:rPr sz="1800" b="0" i="0" u="none" dirty="0">
                 <a:solidFill>
                   <a:srgbClr val="E2E8F0"/>
                 </a:solidFill>
                 <a:latin typeface="Fira Code"/>
               </a:rPr>
-              <a:t> </a:t>
-            </a:r>
-            <a:r>
-              <a:rPr sz="1800" b="0" i="0" u="none">
-                <a:solidFill>
-                  <a:srgbClr val="FCD34D"/>
+              <a:t>);</a:t>
+            </a:r>
+            <a:endParaRPr lang="en-US" sz="1800" b="0" i="0" u="none" dirty="0">
+              <a:solidFill>
+                <a:srgbClr val="E2E8F0"/>
+              </a:solidFill>
+              <a:latin typeface="Fira Code"/>
+            </a:endParaRPr>
+          </a:p>
+          <a:p>
+            <a:pPr algn="l">
+              <a:lnSpc>
+                <a:spcPts val="2700"/>
+              </a:lnSpc>
+            </a:pPr>
+            <a:r>
+              <a:rPr sz="1800" b="0" i="0" u="none" dirty="0">
+                <a:solidFill>
+                  <a:srgbClr val="E2E8F0"/>
                 </a:solidFill>
                 <a:latin typeface="Fira Code"/>
               </a:rPr>
-              <a:t>delay</a:t>
-            </a:r>
-            <a:r>
-              <a:rPr sz="1800" b="0" i="0" u="none">
-                <a:solidFill>
-                  <a:srgbClr val="E2E8F0"/>
-                </a:solidFill>
-                <a:latin typeface="Fira Code"/>
-              </a:rPr>
-              <a:t>(</a:t>
-            </a:r>
-            <a:r>
-              <a:rPr sz="1800" b="0" i="0" u="none">
-                <a:solidFill>
-                  <a:srgbClr val="F9A8D4"/>
-                </a:solidFill>
-                <a:latin typeface="Fira Code"/>
-              </a:rPr>
-              <a:t>1000</a:t>
-            </a:r>
-            <a:r>
-              <a:rPr sz="1800" b="0" i="0" u="none">
-                <a:solidFill>
-                  <a:srgbClr val="E2E8F0"/>
-                </a:solidFill>
-                <a:latin typeface="Fira Code"/>
-              </a:rPr>
-              <a:t>); </a:t>
-            </a:r>
-            <a:r>
-              <a:rPr sz="1800" b="0" i="0" u="none">
-                <a:solidFill>
-                  <a:srgbClr val="64748B"/>
-                </a:solidFill>
-                <a:latin typeface="Fira Code"/>
-              </a:rPr>
-              <a:t>// Tunggu 1 detik</a:t>
-            </a:r>
-            <a:r>
-              <a:rPr sz="1800" b="0" i="0" u="none">
-                <a:solidFill>
-                  <a:srgbClr val="E2E8F0"/>
-                </a:solidFill>
-                <a:latin typeface="Fira Code"/>
-              </a:rPr>
-              <a:t> }</a:t>
+              <a:t>}</a:t>
             </a:r>
           </a:p>
         </p:txBody>
